--- a/docs/UI-Bugs.pptx
+++ b/docs/UI-Bugs.pptx
@@ -6,10 +6,11 @@
   </p:sldMasterIdLst>
   <p:sldIdLst>
     <p:sldId id="256" r:id="rId2"/>
-    <p:sldId id="257" r:id="rId3"/>
-    <p:sldId id="259" r:id="rId4"/>
-    <p:sldId id="260" r:id="rId5"/>
-    <p:sldId id="258" r:id="rId6"/>
+    <p:sldId id="261" r:id="rId3"/>
+    <p:sldId id="257" r:id="rId4"/>
+    <p:sldId id="259" r:id="rId5"/>
+    <p:sldId id="260" r:id="rId6"/>
+    <p:sldId id="258" r:id="rId7"/>
   </p:sldIdLst>
   <p:sldSz cx="12192000" cy="6858000"/>
   <p:notesSz cx="6858000" cy="9144000"/>
@@ -274,7 +275,7 @@
           <a:p>
             <a:fld id="{3B38FC70-68D5-4C7E-BEB4-F3EEBF61C1FC}" type="datetimeFigureOut">
               <a:rPr kumimoji="1" lang="ja-JP" altLang="en-US" smtClean="0"/>
-              <a:t>2026/1/2</a:t>
+              <a:t>2026/1/17</a:t>
             </a:fld>
             <a:endParaRPr kumimoji="1" lang="ja-JP" altLang="en-US"/>
           </a:p>
@@ -504,7 +505,7 @@
           <a:p>
             <a:fld id="{3B38FC70-68D5-4C7E-BEB4-F3EEBF61C1FC}" type="datetimeFigureOut">
               <a:rPr kumimoji="1" lang="ja-JP" altLang="en-US" smtClean="0"/>
-              <a:t>2026/1/2</a:t>
+              <a:t>2026/1/17</a:t>
             </a:fld>
             <a:endParaRPr kumimoji="1" lang="ja-JP" altLang="en-US"/>
           </a:p>
@@ -744,7 +745,7 @@
           <a:p>
             <a:fld id="{3B38FC70-68D5-4C7E-BEB4-F3EEBF61C1FC}" type="datetimeFigureOut">
               <a:rPr kumimoji="1" lang="ja-JP" altLang="en-US" smtClean="0"/>
-              <a:t>2026/1/2</a:t>
+              <a:t>2026/1/17</a:t>
             </a:fld>
             <a:endParaRPr kumimoji="1" lang="ja-JP" altLang="en-US"/>
           </a:p>
@@ -974,7 +975,7 @@
           <a:p>
             <a:fld id="{3B38FC70-68D5-4C7E-BEB4-F3EEBF61C1FC}" type="datetimeFigureOut">
               <a:rPr kumimoji="1" lang="ja-JP" altLang="en-US" smtClean="0"/>
-              <a:t>2026/1/2</a:t>
+              <a:t>2026/1/17</a:t>
             </a:fld>
             <a:endParaRPr kumimoji="1" lang="ja-JP" altLang="en-US"/>
           </a:p>
@@ -1249,7 +1250,7 @@
           <a:p>
             <a:fld id="{3B38FC70-68D5-4C7E-BEB4-F3EEBF61C1FC}" type="datetimeFigureOut">
               <a:rPr kumimoji="1" lang="ja-JP" altLang="en-US" smtClean="0"/>
-              <a:t>2026/1/2</a:t>
+              <a:t>2026/1/17</a:t>
             </a:fld>
             <a:endParaRPr kumimoji="1" lang="ja-JP" altLang="en-US"/>
           </a:p>
@@ -1578,7 +1579,7 @@
           <a:p>
             <a:fld id="{3B38FC70-68D5-4C7E-BEB4-F3EEBF61C1FC}" type="datetimeFigureOut">
               <a:rPr kumimoji="1" lang="ja-JP" altLang="en-US" smtClean="0"/>
-              <a:t>2026/1/2</a:t>
+              <a:t>2026/1/17</a:t>
             </a:fld>
             <a:endParaRPr kumimoji="1" lang="ja-JP" altLang="en-US"/>
           </a:p>
@@ -2054,7 +2055,7 @@
           <a:p>
             <a:fld id="{3B38FC70-68D5-4C7E-BEB4-F3EEBF61C1FC}" type="datetimeFigureOut">
               <a:rPr kumimoji="1" lang="ja-JP" altLang="en-US" smtClean="0"/>
-              <a:t>2026/1/2</a:t>
+              <a:t>2026/1/17</a:t>
             </a:fld>
             <a:endParaRPr kumimoji="1" lang="ja-JP" altLang="en-US"/>
           </a:p>
@@ -2200,7 +2201,7 @@
           <a:p>
             <a:fld id="{3B38FC70-68D5-4C7E-BEB4-F3EEBF61C1FC}" type="datetimeFigureOut">
               <a:rPr kumimoji="1" lang="ja-JP" altLang="en-US" smtClean="0"/>
-              <a:t>2026/1/2</a:t>
+              <a:t>2026/1/17</a:t>
             </a:fld>
             <a:endParaRPr kumimoji="1" lang="ja-JP" altLang="en-US"/>
           </a:p>
@@ -2329,7 +2330,7 @@
           <a:p>
             <a:fld id="{3B38FC70-68D5-4C7E-BEB4-F3EEBF61C1FC}" type="datetimeFigureOut">
               <a:rPr kumimoji="1" lang="ja-JP" altLang="en-US" smtClean="0"/>
-              <a:t>2026/1/2</a:t>
+              <a:t>2026/1/17</a:t>
             </a:fld>
             <a:endParaRPr kumimoji="1" lang="ja-JP" altLang="en-US"/>
           </a:p>
@@ -2672,7 +2673,7 @@
           <a:p>
             <a:fld id="{3B38FC70-68D5-4C7E-BEB4-F3EEBF61C1FC}" type="datetimeFigureOut">
               <a:rPr kumimoji="1" lang="ja-JP" altLang="en-US" smtClean="0"/>
-              <a:t>2026/1/2</a:t>
+              <a:t>2026/1/17</a:t>
             </a:fld>
             <a:endParaRPr kumimoji="1" lang="ja-JP" altLang="en-US"/>
           </a:p>
@@ -2960,7 +2961,7 @@
           <a:p>
             <a:fld id="{3B38FC70-68D5-4C7E-BEB4-F3EEBF61C1FC}" type="datetimeFigureOut">
               <a:rPr kumimoji="1" lang="ja-JP" altLang="en-US" smtClean="0"/>
-              <a:t>2026/1/2</a:t>
+              <a:t>2026/1/17</a:t>
             </a:fld>
             <a:endParaRPr kumimoji="1" lang="ja-JP" altLang="en-US"/>
           </a:p>
@@ -3233,7 +3234,7 @@
           <a:p>
             <a:fld id="{3B38FC70-68D5-4C7E-BEB4-F3EEBF61C1FC}" type="datetimeFigureOut">
               <a:rPr kumimoji="1" lang="ja-JP" altLang="en-US" smtClean="0"/>
-              <a:t>2026/1/2</a:t>
+              <a:t>2026/1/17</a:t>
             </a:fld>
             <a:endParaRPr kumimoji="1" lang="ja-JP" altLang="en-US"/>
           </a:p>
@@ -4940,6 +4941,194 @@
           <p:cNvPr id="2" name="タイトル 1">
             <a:extLst>
               <a:ext uri="{FF2B5EF4-FFF2-40B4-BE49-F238E27FC236}">
+                <a16:creationId xmlns:a16="http://schemas.microsoft.com/office/drawing/2014/main" id="{3ED250B5-EC2B-668E-566D-F97F1B7B884F}"/>
+              </a:ext>
+            </a:extLst>
+          </p:cNvPr>
+          <p:cNvSpPr>
+            <a:spLocks noGrp="1"/>
+          </p:cNvSpPr>
+          <p:nvPr>
+            <p:ph type="title"/>
+          </p:nvPr>
+        </p:nvSpPr>
+        <p:spPr/>
+        <p:txBody>
+          <a:bodyPr>
+            <a:normAutofit fontScale="90000"/>
+          </a:bodyPr>
+          <a:lstStyle/>
+          <a:p>
+            <a:endParaRPr kumimoji="1" lang="ja-JP" altLang="en-US"/>
+          </a:p>
+        </p:txBody>
+      </p:sp>
+      <p:sp>
+        <p:nvSpPr>
+          <p:cNvPr id="3" name="テキスト ボックス 2">
+            <a:extLst>
+              <a:ext uri="{FF2B5EF4-FFF2-40B4-BE49-F238E27FC236}">
+                <a16:creationId xmlns:a16="http://schemas.microsoft.com/office/drawing/2014/main" id="{5ECC9FC3-95D3-9FB1-3B83-770D747139B4}"/>
+              </a:ext>
+            </a:extLst>
+          </p:cNvPr>
+          <p:cNvSpPr txBox="1"/>
+          <p:nvPr/>
+        </p:nvSpPr>
+        <p:spPr>
+          <a:xfrm>
+            <a:off x="2877955" y="2021305"/>
+            <a:ext cx="6439300" cy="2862322"/>
+          </a:xfrm>
+          <a:prstGeom prst="rect">
+            <a:avLst/>
+          </a:prstGeom>
+          <a:solidFill>
+            <a:schemeClr val="bg1"/>
+          </a:solidFill>
+        </p:spPr>
+        <p:txBody>
+          <a:bodyPr wrap="square" rtlCol="0">
+            <a:spAutoFit/>
+          </a:bodyPr>
+          <a:lstStyle/>
+          <a:p>
+            <a:pPr fontAlgn="base"/>
+            <a:r>
+              <a:rPr lang="ja-JP" altLang="en-US" dirty="0"/>
+              <a:t>○ </a:t>
+            </a:r>
+            <a:r>
+              <a:rPr lang="en-US" altLang="ja-JP" dirty="0"/>
+              <a:t>A.</a:t>
+            </a:r>
+            <a:r>
+              <a:rPr lang="ja-JP" altLang="en-US" dirty="0"/>
+              <a:t> ウ　国民には義務だけがあり、権利は特にない</a:t>
+            </a:r>
+          </a:p>
+          <a:p>
+            <a:pPr fontAlgn="base"/>
+            <a:endParaRPr lang="en-US" altLang="ja-JP" dirty="0"/>
+          </a:p>
+          <a:p>
+            <a:pPr fontAlgn="base"/>
+            <a:r>
+              <a:rPr lang="ja-JP" altLang="en-US" dirty="0"/>
+              <a:t>○ </a:t>
+            </a:r>
+            <a:r>
+              <a:rPr lang="en-US" altLang="ja-JP" dirty="0"/>
+              <a:t>B.</a:t>
+            </a:r>
+            <a:r>
+              <a:rPr lang="ja-JP" altLang="en-US" dirty="0"/>
+              <a:t> ア　国民には選挙権などの権利があり、税金を納める</a:t>
+            </a:r>
+            <a:endParaRPr lang="en-US" altLang="ja-JP" dirty="0"/>
+          </a:p>
+          <a:p>
+            <a:pPr fontAlgn="base"/>
+            <a:r>
+              <a:rPr lang="en-US" altLang="ja-JP" dirty="0"/>
+              <a:t>         </a:t>
+            </a:r>
+            <a:r>
+              <a:rPr lang="ja-JP" altLang="en-US" dirty="0"/>
+              <a:t>義務もある</a:t>
+            </a:r>
+            <a:endParaRPr lang="en-US" altLang="ja-JP" dirty="0"/>
+          </a:p>
+          <a:p>
+            <a:pPr fontAlgn="base"/>
+            <a:endParaRPr lang="ja-JP" altLang="en-US" dirty="0"/>
+          </a:p>
+          <a:p>
+            <a:pPr fontAlgn="base"/>
+            <a:r>
+              <a:rPr lang="ja-JP" altLang="en-US" dirty="0"/>
+              <a:t>○ </a:t>
+            </a:r>
+            <a:r>
+              <a:rPr lang="en-US" altLang="ja-JP" dirty="0"/>
+              <a:t>C.</a:t>
+            </a:r>
+            <a:r>
+              <a:rPr lang="ja-JP" altLang="en-US" dirty="0"/>
+              <a:t> エ　国民の権利と義務は、その人の年齢によって決ま</a:t>
+            </a:r>
+            <a:endParaRPr lang="en-US" altLang="ja-JP" dirty="0"/>
+          </a:p>
+          <a:p>
+            <a:pPr fontAlgn="base"/>
+            <a:r>
+              <a:rPr lang="en-US" altLang="ja-JP" dirty="0"/>
+              <a:t>         </a:t>
+            </a:r>
+            <a:r>
+              <a:rPr lang="ja-JP" altLang="en-US" dirty="0"/>
+              <a:t>る</a:t>
+            </a:r>
+          </a:p>
+          <a:p>
+            <a:pPr fontAlgn="base"/>
+            <a:endParaRPr lang="en-US" altLang="ja-JP" dirty="0"/>
+          </a:p>
+          <a:p>
+            <a:pPr fontAlgn="base"/>
+            <a:r>
+              <a:rPr lang="ja-JP" altLang="en-US" dirty="0"/>
+              <a:t>○ </a:t>
+            </a:r>
+            <a:r>
+              <a:rPr lang="en-US" altLang="ja-JP" dirty="0"/>
+              <a:t>D. </a:t>
+            </a:r>
+            <a:r>
+              <a:rPr lang="ja-JP" altLang="en-US" dirty="0"/>
+              <a:t>イ　国民には権利だけがあり、義務は特にない</a:t>
+            </a:r>
+          </a:p>
+          <a:p>
+            <a:endParaRPr kumimoji="1" lang="ja-JP" altLang="en-US" dirty="0"/>
+          </a:p>
+        </p:txBody>
+      </p:sp>
+    </p:spTree>
+    <p:extLst>
+      <p:ext uri="{BB962C8B-B14F-4D97-AF65-F5344CB8AC3E}">
+        <p14:creationId xmlns:p14="http://schemas.microsoft.com/office/powerpoint/2010/main" val="3334858094"/>
+      </p:ext>
+    </p:extLst>
+  </p:cSld>
+  <p:clrMapOvr>
+    <a:masterClrMapping/>
+  </p:clrMapOvr>
+</p:sld>
+</file>
+
+<file path=ppt/slides/slide3.xml><?xml version="1.0" encoding="utf-8"?>
+<p:sld xmlns:a="http://schemas.openxmlformats.org/drawingml/2006/main" xmlns:r="http://schemas.openxmlformats.org/officeDocument/2006/relationships" xmlns:p="http://schemas.openxmlformats.org/presentationml/2006/main">
+  <p:cSld>
+    <p:spTree>
+      <p:nvGrpSpPr>
+        <p:cNvPr id="1" name=""/>
+        <p:cNvGrpSpPr/>
+        <p:nvPr/>
+      </p:nvGrpSpPr>
+      <p:grpSpPr>
+        <a:xfrm>
+          <a:off x="0" y="0"/>
+          <a:ext cx="0" cy="0"/>
+          <a:chOff x="0" y="0"/>
+          <a:chExt cx="0" cy="0"/>
+        </a:xfrm>
+      </p:grpSpPr>
+      <p:sp>
+        <p:nvSpPr>
+          <p:cNvPr id="2" name="タイトル 1">
+            <a:extLst>
+              <a:ext uri="{FF2B5EF4-FFF2-40B4-BE49-F238E27FC236}">
                 <a16:creationId xmlns:a16="http://schemas.microsoft.com/office/drawing/2014/main" id="{A916FB1B-F0F2-FD9D-69CF-A252689DD584}"/>
               </a:ext>
             </a:extLst>
@@ -5040,7 +5229,7 @@
 </p:sld>
 </file>
 
-<file path=ppt/slides/slide3.xml><?xml version="1.0" encoding="utf-8"?>
+<file path=ppt/slides/slide4.xml><?xml version="1.0" encoding="utf-8"?>
 <p:sld xmlns:a="http://schemas.openxmlformats.org/drawingml/2006/main" xmlns:r="http://schemas.openxmlformats.org/officeDocument/2006/relationships" xmlns:p="http://schemas.openxmlformats.org/presentationml/2006/main">
   <p:cSld>
     <p:spTree>
@@ -5237,7 +5426,7 @@
 </p:sld>
 </file>
 
-<file path=ppt/slides/slide4.xml><?xml version="1.0" encoding="utf-8"?>
+<file path=ppt/slides/slide5.xml><?xml version="1.0" encoding="utf-8"?>
 <p:sld xmlns:a="http://schemas.openxmlformats.org/drawingml/2006/main" xmlns:r="http://schemas.openxmlformats.org/officeDocument/2006/relationships" xmlns:p="http://schemas.openxmlformats.org/presentationml/2006/main">
   <p:cSld>
     <p:spTree>
@@ -5527,7 +5716,7 @@
 </p:sld>
 </file>
 
-<file path=ppt/slides/slide5.xml><?xml version="1.0" encoding="utf-8"?>
+<file path=ppt/slides/slide6.xml><?xml version="1.0" encoding="utf-8"?>
 <p:sld xmlns:a="http://schemas.openxmlformats.org/drawingml/2006/main" xmlns:r="http://schemas.openxmlformats.org/officeDocument/2006/relationships" xmlns:p="http://schemas.openxmlformats.org/presentationml/2006/main">
   <p:cSld>
     <p:spTree>
